--- a/curso_es/pptx/S31.pptx
+++ b/curso_es/pptx/S31.pptx
@@ -4108,7 +4108,7 @@
                 </a:solidFill>
                 <a:latin typeface="Nunito Sans"/>
               </a:rPr>
-              <a:t>Leire busca información sobre una ola de calor. Encuentra un blog sin autor y una noticia de un periódico con datos de la Agencia Estatal de Meteorología.</a:t>
+              <a:t>Una chica busca información sobre una ola de calor. Encuentra un blog sin autor y una noticia de un periódico con datos de la Agencia Estatal de Meteorología.</a:t>
             </a:r>
           </a:p>
         </p:txBody>
@@ -6024,7 +6024,7 @@
                 </a:solidFill>
                 <a:latin typeface="Nunito Sans"/>
               </a:rPr>
-              <a:t>En los experimentos de la unidad 5, Asch estudió la ______; Milgram, la obediencia.  (sesión 30)</a:t>
+              <a:t>En los experimentos de la unidad 5, el de las líneas estudió la ______; el de las descargas, la obediencia.  (sesión 30)</a:t>
             </a:r>
           </a:p>
           <a:p>
@@ -6244,7 +6244,7 @@
                 </a:solidFill>
                 <a:latin typeface="Nunito Sans"/>
               </a:rPr>
-              <a:t>En los experimentos de la unidad 5, Asch estudió la </a:t>
+              <a:t>En los experimentos de la unidad 5, el de las líneas estudió la </a:t>
             </a:r>
             <a:r>
               <a:rPr sz="2600" b="1">
@@ -6262,7 +6262,7 @@
                 </a:solidFill>
                 <a:latin typeface="Nunito Sans"/>
               </a:rPr>
-              <a:t>; Milgram, la obediencia.  (sesión 30)</a:t>
+              <a:t>; el de las descargas, la obediencia.  (sesión 30)</a:t>
             </a:r>
           </a:p>
           <a:p>
